--- a/carpentry/intake-142/PowerPoint/Day-15_2026-11-25_Week-5.pptx
+++ b/carpentry/intake-142/PowerPoint/Day-15_2026-11-25_Week-5.pptx
@@ -706,7 +706,7 @@
           <a:p/>
           <a:p>
             <a:r>
-              <a:t>Open textbook sections 8.1–8.2 on pages 124–125 and keep the formula sheet on page 219 available. We will use exercise book 8A Q1–8 and 8B Q12. A letter in a formula stands for a quantity, such as the length of a rectangle. It is not an instruction to guess a number. What must we know before replacing that letter? Which measurement it represents and its unit. We will write those meanings before entering values into a calculator.</a:t>
+              <a:t>Open textbook sections 8.1–8.2 on pages 192–194 and keep the formula sheet on page 361 available. We will use exercise book 8A Q1–8 and 8B Q12. A letter in a formula stands for a quantity, such as the length of a rectangle. It is not an instruction to guess a number. What must we know before replacing that letter? Which measurement it represents and its unit. We will write those meanings before entering values into a calculator.</a:t>
             </a:r>
           </a:p>
         </p:txBody>
@@ -1086,7 +1086,7 @@
           <a:p/>
           <a:p>
             <a:r>
-              <a:t>The calculator line on page 125 includes brackets: 2 × (1200 + 800). Entering those brackets gives 4000 millimetres. Without them, the calculator multiplies two by 1200 first, then adds 800, producing 3200. That arithmetic is valid for a different expression, but it is not the rectangle’s perimeter. What edge lengths would be missing? The ungrouped expression counts two lengths and only one width. This physical interpretation explains why the brackets matter. Copy the formula’s structure before replacing letters with numbers, and confirm the output unit is millimetres rather than square millimetres.</a:t>
+              <a:t>The calculator line on page 193 includes brackets: 2 × (1200 + 800). Entering those brackets gives 4000 millimetres. Without them, the calculator multiplies two by 1200 first, then adds 800, producing 3200. That arithmetic is valid for a different expression, but it is not the rectangle’s perimeter. What edge lengths would be missing? The ungrouped expression counts two lengths and only one width. This physical interpretation explains why the brackets matter. Copy the formula’s structure before replacing letters with numbers, and confirm the output unit is millimetres rather than square millimetres.</a:t>
             </a:r>
           </a:p>
         </p:txBody>
@@ -2256,7 +2256,7 @@
           <a:p/>
           <a:p>
             <a:r>
-              <a:t>Suppose you know the total distance around a frame and its width, but the length is missing. A formula can help us recover that length if we undo its operations carefully. Open textbook sections 8.3–8.5, pages 126–130, and section 8.7 on page 134. What must stay true while we rearrange? Both sides must remain equal. We will use inverse operations, write each step and put the answer back into the original formula to check it.</a:t>
+              <a:t>Suppose you know the total distance around a frame and its width, but the length is missing. A formula can help us recover that length if we undo its operations carefully. Open textbook sections 8.3–8.5, pages 195–200, and section 8.7 on pages 203–204. What must stay true while we rearrange? Both sides must remain equal. We will use inverse operations, write each step and put the answer back into the original formula to check it.</a:t>
             </a:r>
           </a:p>
         </p:txBody>
@@ -5528,7 +5528,7 @@
                 </a:solidFill>
                 <a:latin typeface="Arial"/>
               </a:rPr>
-              <a:t>Textbook sections 8.1–8.2 pp.124–125; formula sheet p.219</a:t>
+              <a:t>Textbook sections 8.1–8.2 pp.192–194; formula sheet p.361</a:t>
             </a:r>
           </a:p>
         </p:txBody>
@@ -6286,7 +6286,7 @@
                 </a:solidFill>
                 <a:latin typeface="Arial"/>
               </a:rPr>
-              <a:t>Textbook sections 8.1–8.2 pp.124–125; formula sheet p.219</a:t>
+              <a:t>Textbook sections 8.1–8.2 pp.192–194; formula sheet p.361</a:t>
             </a:r>
           </a:p>
         </p:txBody>
@@ -6486,7 +6486,7 @@
                 </a:solidFill>
                 <a:latin typeface="Arial"/>
               </a:rPr>
-              <a:t>Resources: Exercise Book 8A Q1–8 (p.51); 8B Q12 (p.54)</a:t>
+              <a:t>Resources: Exercise Book 8A Q1–8 (p.77); 8B Q12 (p.80)</a:t>
             </a:r>
           </a:p>
         </p:txBody>
@@ -7100,7 +7100,7 @@
                 </a:solidFill>
                 <a:latin typeface="Arial"/>
               </a:rPr>
-              <a:t>Textbook sections 8.1–8.2 pp.124–125; formula sheet p.219</a:t>
+              <a:t>Textbook sections 8.1–8.2 pp.192–194; formula sheet p.361</a:t>
             </a:r>
           </a:p>
         </p:txBody>
@@ -7831,7 +7831,7 @@
                 </a:solidFill>
                 <a:latin typeface="Arial"/>
               </a:rPr>
-              <a:t>Textbook sections 8.1–8.2 pp.124–125; formula sheet p.219</a:t>
+              <a:t>Textbook sections 8.1–8.2 pp.192–194; formula sheet p.361</a:t>
             </a:r>
           </a:p>
         </p:txBody>
@@ -8565,7 +8565,7 @@
                 </a:solidFill>
                 <a:latin typeface="Arial"/>
               </a:rPr>
-              <a:t>Textbook sections 8.1–8.2 pp.124–125; formula sheet p.219</a:t>
+              <a:t>Textbook sections 8.1–8.2 pp.192–194; formula sheet p.361</a:t>
             </a:r>
           </a:p>
         </p:txBody>
@@ -8765,7 +8765,7 @@
                 </a:solidFill>
                 <a:latin typeface="Arial"/>
               </a:rPr>
-              <a:t>Resources: Exercise Book 8A Q1–8 (p.51); 8B Q12 (p.54)</a:t>
+              <a:t>Resources: Exercise Book 8A Q1–8 (p.77); 8B Q12 (p.80)</a:t>
             </a:r>
           </a:p>
         </p:txBody>
@@ -9379,7 +9379,7 @@
                 </a:solidFill>
                 <a:latin typeface="Arial"/>
               </a:rPr>
-              <a:t>Textbook sections 8.1–8.2 pp.124–125; formula sheet p.219</a:t>
+              <a:t>Textbook sections 8.1–8.2 pp.192–194; formula sheet p.361</a:t>
             </a:r>
           </a:p>
         </p:txBody>
@@ -10155,7 +10155,7 @@
                 </a:solidFill>
                 <a:latin typeface="Arial"/>
               </a:rPr>
-              <a:t>Textbook sections 8.1–8.2 pp.124–125; formula sheet p.219</a:t>
+              <a:t>Textbook sections 8.1–8.2 pp.192–194; formula sheet p.361</a:t>
             </a:r>
           </a:p>
         </p:txBody>
@@ -11114,7 +11114,7 @@
                 </a:solidFill>
                 <a:latin typeface="Arial"/>
               </a:rPr>
-              <a:t>Textbook sections 8.1–8.2 pp.124–125; formula sheet p.219</a:t>
+              <a:t>Textbook sections 8.1–8.2 pp.192–194; formula sheet p.361</a:t>
             </a:r>
           </a:p>
         </p:txBody>
@@ -11825,7 +11825,7 @@
                 </a:solidFill>
                 <a:latin typeface="Arial"/>
               </a:rPr>
-              <a:t>Textbook sections 8.1–8.2 pp.124–125; formula sheet p.219</a:t>
+              <a:t>Textbook sections 8.1–8.2 pp.192–194; formula sheet p.361</a:t>
             </a:r>
           </a:p>
         </p:txBody>
@@ -12536,7 +12536,7 @@
                 </a:solidFill>
                 <a:latin typeface="Arial"/>
               </a:rPr>
-              <a:t>Textbook sections 8.1–8.2 pp.124–125; formula sheet p.219</a:t>
+              <a:t>Textbook sections 8.1–8.2 pp.192–194; formula sheet p.361</a:t>
             </a:r>
           </a:p>
         </p:txBody>
@@ -12736,7 +12736,7 @@
                 </a:solidFill>
                 <a:latin typeface="Arial"/>
               </a:rPr>
-              <a:t>Resources: Exercise Book 8A Q1–8 (p.51); 8B Q12 (p.54)</a:t>
+              <a:t>Resources: Exercise Book 8A Q1–8 (p.77); 8B Q12 (p.80)</a:t>
             </a:r>
           </a:p>
         </p:txBody>
@@ -16702,7 +16702,7 @@
                 </a:solidFill>
                 <a:latin typeface="Arial"/>
               </a:rPr>
-              <a:t>Textbook sections 8.1–8.2 pp.124–125; formula sheet p.219</a:t>
+              <a:t>Textbook sections 8.1–8.2 pp.192–194; formula sheet p.361</a:t>
             </a:r>
           </a:p>
         </p:txBody>
@@ -17413,7 +17413,7 @@
                 </a:solidFill>
                 <a:latin typeface="Arial"/>
               </a:rPr>
-              <a:t>Textbook sections 8.1–8.2 pp.124–125; formula sheet p.219</a:t>
+              <a:t>Textbook sections 8.1–8.2 pp.192–194; formula sheet p.361</a:t>
             </a:r>
           </a:p>
         </p:txBody>
@@ -18124,7 +18124,7 @@
                 </a:solidFill>
                 <a:latin typeface="Arial"/>
               </a:rPr>
-              <a:t>Textbook sections 8.1–8.2 pp.124–125; formula sheet p.219</a:t>
+              <a:t>Textbook sections 8.1–8.2 pp.192–194; formula sheet p.361</a:t>
             </a:r>
           </a:p>
         </p:txBody>
@@ -18324,7 +18324,7 @@
                 </a:solidFill>
                 <a:latin typeface="Arial"/>
               </a:rPr>
-              <a:t>Resources: Exercise Book 8A Q1–8 (p.51); 8B Q12 (p.54)</a:t>
+              <a:t>Resources: Exercise Book 8A Q1–8 (p.77); 8B Q12 (p.80)</a:t>
             </a:r>
           </a:p>
         </p:txBody>
@@ -19603,7 +19603,7 @@
                 </a:solidFill>
                 <a:latin typeface="Arial"/>
               </a:rPr>
-              <a:t>Textbook sections 8.3–8.5 pp.126–130; sections 8.7 p.134</a:t>
+              <a:t>Textbook sections 8.3–8.5 pp.195–200; sections 8.7 pp.203–204</a:t>
             </a:r>
           </a:p>
         </p:txBody>
@@ -19803,7 +19803,7 @@
                 </a:solidFill>
                 <a:latin typeface="Arial"/>
               </a:rPr>
-              <a:t>Textbook sections 8.3–8.5 pp.126–130; sections 8.7 p.134</a:t>
+              <a:t>Textbook sections 8.3–8.5 pp.195–200; sections 8.7 pp.203–204</a:t>
             </a:r>
           </a:p>
         </p:txBody>
@@ -19851,7 +19851,7 @@
                 </a:solidFill>
                 <a:latin typeface="Arial"/>
               </a:rPr>
-              <a:t>Exercise Book 8A Q9–22 (pp.51–52), selected; 8B Q1,4 (p.53), Q15 (p.54)</a:t>
+              <a:t>Exercise Book 8A Q9–22 (pp.77–78), selected; 8B Q1,4 (p.79), Q15 (p.80)</a:t>
             </a:r>
           </a:p>
         </p:txBody>
@@ -20513,7 +20513,7 @@
                 </a:solidFill>
                 <a:latin typeface="Arial"/>
               </a:rPr>
-              <a:t>Textbook sections 8.3–8.5 pp.126–130; sections 8.7 p.134</a:t>
+              <a:t>Textbook sections 8.3–8.5 pp.195–200; sections 8.7 pp.203–204</a:t>
             </a:r>
           </a:p>
         </p:txBody>
@@ -20713,7 +20713,7 @@
                 </a:solidFill>
                 <a:latin typeface="Arial"/>
               </a:rPr>
-              <a:t>Resources: Exercise Book 8A Q9–22 (pp.51–52), selected; 8B Q1,4 (p.53), Q15 (p.54)</a:t>
+              <a:t>Resources: Exercise Book 8A Q9–22 (pp.77–78), selected; 8B Q1,4 (p.79), Q15 (p.80)</a:t>
             </a:r>
           </a:p>
         </p:txBody>
@@ -21327,7 +21327,7 @@
                 </a:solidFill>
                 <a:latin typeface="Arial"/>
               </a:rPr>
-              <a:t>Textbook sections 8.3–8.5 pp.126–130; sections 8.7 p.134</a:t>
+              <a:t>Textbook sections 8.3–8.5 pp.195–200; sections 8.7 pp.203–204</a:t>
             </a:r>
           </a:p>
         </p:txBody>
@@ -22173,7 +22173,7 @@
                 </a:solidFill>
                 <a:latin typeface="Arial"/>
               </a:rPr>
-              <a:t>Textbook sections 8.3–8.5 pp.126–130; sections 8.7 p.134</a:t>
+              <a:t>Textbook sections 8.3–8.5 pp.195–200; sections 8.7 pp.203–204</a:t>
             </a:r>
           </a:p>
         </p:txBody>
@@ -23394,7 +23394,7 @@
                 </a:solidFill>
                 <a:latin typeface="Arial"/>
               </a:rPr>
-              <a:t>Textbook sections 8.3–8.5 pp.126–130; sections 8.7 p.134</a:t>
+              <a:t>Textbook sections 8.3–8.5 pp.195–200; sections 8.7 pp.203–204</a:t>
             </a:r>
           </a:p>
         </p:txBody>
@@ -24760,7 +24760,7 @@
                 <a:ea typeface="Arial" pitchFamily="34" charset="-122"/>
                 <a:cs typeface="Arial" pitchFamily="34" charset="-120"/>
               </a:rPr>
-              <a:t>Textbook pp.126–130,134 • Exercise Book pp.51–54 • Worked example: Exercise Book 8B Q15</a:t>
+              <a:t>Textbook pp.194–200,203–204 • Exercise Book pp.77–80 • Worked example: Exercise Book 8B Q15</a:t>
             </a:r>
             <a:endParaRPr lang="en-US" sz="1050" dirty="0"/>
           </a:p>
@@ -25335,7 +25335,7 @@
                 </a:solidFill>
                 <a:latin typeface="Arial"/>
               </a:rPr>
-              <a:t>Textbook sections 8.1–8.2 pp.124–125; formula sheet p.219</a:t>
+              <a:t>Textbook sections 8.1–8.2 pp.192–194; formula sheet p.361</a:t>
             </a:r>
           </a:p>
         </p:txBody>
@@ -25535,7 +25535,7 @@
                 </a:solidFill>
                 <a:latin typeface="Arial"/>
               </a:rPr>
-              <a:t>Textbook sections 8.1–8.2 pp.124–125; formula sheet p.219</a:t>
+              <a:t>Textbook sections 8.1–8.2 pp.192–194; formula sheet p.361</a:t>
             </a:r>
           </a:p>
         </p:txBody>
@@ -25583,7 +25583,7 @@
                 </a:solidFill>
                 <a:latin typeface="Arial"/>
               </a:rPr>
-              <a:t>Exercise Book 8A Q1–8 (p.51); 8B Q12 (p.54)</a:t>
+              <a:t>Exercise Book 8A Q1–8 (p.77); 8B Q12 (p.80)</a:t>
             </a:r>
           </a:p>
         </p:txBody>
@@ -26197,7 +26197,7 @@
                 </a:solidFill>
                 <a:latin typeface="Arial"/>
               </a:rPr>
-              <a:t>Textbook  |  page 130</a:t>
+              <a:t>Textbook  |  page 199</a:t>
             </a:r>
           </a:p>
         </p:txBody>
@@ -26245,7 +26245,7 @@
                 </a:solidFill>
                 <a:latin typeface="Arial"/>
               </a:rPr>
-              <a:t>Textbook sections 8.3–8.5 pp.126–130; sections 8.7 p.134</a:t>
+              <a:t>Textbook sections 8.3–8.5 pp.195–200; sections 8.7 pp.203–204</a:t>
             </a:r>
           </a:p>
         </p:txBody>
@@ -26317,7 +26317,7 @@
                 </a:solidFill>
                 <a:latin typeface="Arial"/>
               </a:rPr>
-              <a:t>Textbook p.130 • Example 8.8 — Undo two operations to find a length</a:t>
+              <a:t>Textbook p.199 • Example 8.8 — Undo two operations to find a length</a:t>
             </a:r>
           </a:p>
         </p:txBody>
@@ -26883,7 +26883,7 @@
                 </a:solidFill>
                 <a:latin typeface="Arial"/>
               </a:rPr>
-              <a:t>Textbook  |  page 130</a:t>
+              <a:t>Textbook  |  page 199</a:t>
             </a:r>
           </a:p>
         </p:txBody>
@@ -26931,7 +26931,7 @@
                 </a:solidFill>
                 <a:latin typeface="Arial"/>
               </a:rPr>
-              <a:t>Textbook sections 8.3–8.5 pp.126–130; sections 8.7 p.134</a:t>
+              <a:t>Textbook sections 8.3–8.5 pp.195–200; sections 8.7 pp.203–204</a:t>
             </a:r>
           </a:p>
         </p:txBody>
@@ -27003,7 +27003,7 @@
                 </a:solidFill>
                 <a:latin typeface="Arial"/>
               </a:rPr>
-              <a:t>Textbook p.130 • Example 8.8 — Substitute back into the original perimeter formula</a:t>
+              <a:t>Textbook p.199 • Example 8.8 — Substitute back into the original perimeter formula</a:t>
             </a:r>
           </a:p>
         </p:txBody>
@@ -27617,7 +27617,7 @@
                 </a:solidFill>
                 <a:latin typeface="Arial"/>
               </a:rPr>
-              <a:t>Textbook sections 8.3–8.5 pp.126–130; sections 8.7 p.134</a:t>
+              <a:t>Textbook sections 8.3–8.5 pp.195–200; sections 8.7 pp.203–204</a:t>
             </a:r>
           </a:p>
         </p:txBody>
@@ -28375,7 +28375,7 @@
                 </a:solidFill>
                 <a:latin typeface="Arial"/>
               </a:rPr>
-              <a:t>Textbook sections 8.3–8.5 pp.126–130; sections 8.7 p.134</a:t>
+              <a:t>Textbook sections 8.3–8.5 pp.195–200; sections 8.7 pp.203–204</a:t>
             </a:r>
           </a:p>
         </p:txBody>
@@ -28575,7 +28575,7 @@
                 </a:solidFill>
                 <a:latin typeface="Arial"/>
               </a:rPr>
-              <a:t>Resources: Exercise Book 8A Q9–22 (pp.51–52), selected; 8B Q1,4 (p.53), Q15 (p.54)</a:t>
+              <a:t>Resources: Exercise Book 8A Q9–22 (pp.77–78), selected; 8B Q1,4 (p.79), Q15 (p.80)</a:t>
             </a:r>
           </a:p>
         </p:txBody>
@@ -29189,7 +29189,7 @@
                 </a:solidFill>
                 <a:latin typeface="Arial"/>
               </a:rPr>
-              <a:t>Textbook sections 8.3–8.5 pp.126–130; sections 8.7 p.134</a:t>
+              <a:t>Textbook sections 8.3–8.5 pp.195–200; sections 8.7 pp.203–204</a:t>
             </a:r>
           </a:p>
         </p:txBody>
@@ -29945,7 +29945,7 @@
                 </a:solidFill>
                 <a:latin typeface="Arial"/>
               </a:rPr>
-              <a:t>Textbook sections 8.3–8.5 pp.126–130; sections 8.7 p.134</a:t>
+              <a:t>Textbook sections 8.3–8.5 pp.195–200; sections 8.7 pp.203–204</a:t>
             </a:r>
           </a:p>
         </p:txBody>
@@ -30679,7 +30679,7 @@
                 </a:solidFill>
                 <a:latin typeface="Arial"/>
               </a:rPr>
-              <a:t>Textbook sections 8.3–8.5 pp.126–130; sections 8.7 p.134</a:t>
+              <a:t>Textbook sections 8.3–8.5 pp.195–200; sections 8.7 pp.203–204</a:t>
             </a:r>
           </a:p>
         </p:txBody>
@@ -30879,7 +30879,7 @@
                 </a:solidFill>
                 <a:latin typeface="Arial"/>
               </a:rPr>
-              <a:t>Resources: Exercise Book 8A Q9–22 (pp.51–52), selected; 8B Q1,4 (p.53), Q15 (p.54)</a:t>
+              <a:t>Resources: Exercise Book 8A Q9–22 (pp.77–78), selected; 8B Q1,4 (p.79), Q15 (p.80)</a:t>
             </a:r>
           </a:p>
         </p:txBody>
@@ -31493,7 +31493,7 @@
                 </a:solidFill>
                 <a:latin typeface="Arial"/>
               </a:rPr>
-              <a:t>Textbook sections 8.3–8.5 pp.126–130; sections 8.7 p.134</a:t>
+              <a:t>Textbook sections 8.3–8.5 pp.195–200; sections 8.7 pp.203–204</a:t>
             </a:r>
           </a:p>
         </p:txBody>
@@ -32269,7 +32269,7 @@
                 </a:solidFill>
                 <a:latin typeface="Arial"/>
               </a:rPr>
-              <a:t>Textbook sections 8.3–8.5 pp.126–130; sections 8.7 p.134</a:t>
+              <a:t>Textbook sections 8.3–8.5 pp.195–200; sections 8.7 pp.203–204</a:t>
             </a:r>
           </a:p>
         </p:txBody>
@@ -33228,7 +33228,7 @@
                 </a:solidFill>
                 <a:latin typeface="Arial"/>
               </a:rPr>
-              <a:t>Textbook sections 8.3–8.5 pp.126–130; sections 8.7 p.134</a:t>
+              <a:t>Textbook sections 8.3–8.5 pp.195–200; sections 8.7 pp.203–204</a:t>
             </a:r>
           </a:p>
         </p:txBody>
@@ -33939,7 +33939,7 @@
                 </a:solidFill>
                 <a:latin typeface="Arial"/>
               </a:rPr>
-              <a:t>Textbook sections 8.1–8.2 pp.124–125; formula sheet p.219</a:t>
+              <a:t>Textbook sections 8.1–8.2 pp.192–194; formula sheet p.361</a:t>
             </a:r>
           </a:p>
         </p:txBody>
@@ -34139,7 +34139,7 @@
                 </a:solidFill>
                 <a:latin typeface="Arial"/>
               </a:rPr>
-              <a:t>Resources: Exercise Book 8A Q1–8 (p.51); 8B Q12 (p.54)</a:t>
+              <a:t>Resources: Exercise Book 8A Q1–8 (p.77); 8B Q12 (p.80)</a:t>
             </a:r>
           </a:p>
         </p:txBody>
@@ -34753,7 +34753,7 @@
                 </a:solidFill>
                 <a:latin typeface="Arial"/>
               </a:rPr>
-              <a:t>Textbook sections 8.3–8.5 pp.126–130; sections 8.7 p.134</a:t>
+              <a:t>Textbook sections 8.3–8.5 pp.195–200; sections 8.7 pp.203–204</a:t>
             </a:r>
           </a:p>
         </p:txBody>
@@ -35464,7 +35464,7 @@
                 </a:solidFill>
                 <a:latin typeface="Arial"/>
               </a:rPr>
-              <a:t>Textbook sections 8.3–8.5 pp.126–130; sections 8.7 p.134</a:t>
+              <a:t>Textbook sections 8.3–8.5 pp.195–200; sections 8.7 pp.203–204</a:t>
             </a:r>
           </a:p>
         </p:txBody>
@@ -35664,7 +35664,7 @@
                 </a:solidFill>
                 <a:latin typeface="Arial"/>
               </a:rPr>
-              <a:t>Resources: Exercise Book 8A Q9–22 (pp.51–52), selected; 8B Q1,4 (p.53), Q15 (p.54)</a:t>
+              <a:t>Resources: Exercise Book 8A Q9–22 (pp.77–78), selected; 8B Q1,4 (p.79), Q15 (p.80)</a:t>
             </a:r>
           </a:p>
         </p:txBody>
@@ -36278,7 +36278,7 @@
                 </a:solidFill>
                 <a:latin typeface="Arial"/>
               </a:rPr>
-              <a:t>Textbook sections 8.3–8.5 pp.126–130; sections 8.7 p.134</a:t>
+              <a:t>Textbook sections 8.3–8.5 pp.195–200; sections 8.7 pp.203–204</a:t>
             </a:r>
           </a:p>
         </p:txBody>
@@ -36989,7 +36989,7 @@
                 </a:solidFill>
                 <a:latin typeface="Arial"/>
               </a:rPr>
-              <a:t>Textbook sections 8.3–8.5 pp.126–130; sections 8.7 p.134</a:t>
+              <a:t>Textbook sections 8.3–8.5 pp.195–200; sections 8.7 pp.203–204</a:t>
             </a:r>
           </a:p>
         </p:txBody>
@@ -37700,7 +37700,7 @@
                 </a:solidFill>
                 <a:latin typeface="Arial"/>
               </a:rPr>
-              <a:t>Textbook sections 8.3–8.5 pp.126–130; sections 8.7 p.134</a:t>
+              <a:t>Textbook sections 8.3–8.5 pp.195–200; sections 8.7 pp.203–204</a:t>
             </a:r>
           </a:p>
         </p:txBody>
@@ -37900,7 +37900,7 @@
                 </a:solidFill>
                 <a:latin typeface="Arial"/>
               </a:rPr>
-              <a:t>Resources: Exercise Book 8A Q9–22 (pp.51–52), selected; 8B Q1,4 (p.53), Q15 (p.54)</a:t>
+              <a:t>Resources: Exercise Book 8A Q9–22 (pp.77–78), selected; 8B Q1,4 (p.79), Q15 (p.80)</a:t>
             </a:r>
           </a:p>
         </p:txBody>
@@ -38649,7 +38649,7 @@
                 </a:solidFill>
                 <a:latin typeface="Arial"/>
               </a:rPr>
-              <a:t>Textbook sections 8.1–8.2 pp.124–125; formula sheet p.219</a:t>
+              <a:t>Textbook sections 8.1–8.2 pp.192–194; formula sheet p.361</a:t>
             </a:r>
           </a:p>
         </p:txBody>
@@ -39894,7 +39894,7 @@
                 </a:solidFill>
                 <a:latin typeface="Arial"/>
               </a:rPr>
-              <a:t>Textbook sections 8.1–8.2 pp.124–125; formula sheet p.219</a:t>
+              <a:t>Textbook sections 8.1–8.2 pp.192–194; formula sheet p.361</a:t>
             </a:r>
           </a:p>
         </p:txBody>
@@ -41871,7 +41871,7 @@
                 </a:solidFill>
                 <a:latin typeface="Arial"/>
               </a:rPr>
-              <a:t>Textbook  |  page 125</a:t>
+              <a:t>Textbook  |  page 193</a:t>
             </a:r>
           </a:p>
         </p:txBody>
@@ -41919,7 +41919,7 @@
                 </a:solidFill>
                 <a:latin typeface="Arial"/>
               </a:rPr>
-              <a:t>Textbook sections 8.1–8.2 pp.124–125; formula sheet p.219</a:t>
+              <a:t>Textbook sections 8.1–8.2 pp.192–194; formula sheet p.361</a:t>
             </a:r>
           </a:p>
         </p:txBody>
@@ -41991,7 +41991,7 @@
                 </a:solidFill>
                 <a:latin typeface="Arial"/>
               </a:rPr>
-              <a:t>Textbook p.125 • Example 8.1 — Substitution into area and perimeter formulas</a:t>
+              <a:t>Textbook p.193 • Example 8.1 — Substitution into area and perimeter formulas</a:t>
             </a:r>
           </a:p>
         </p:txBody>
@@ -42557,7 +42557,7 @@
                 </a:solidFill>
                 <a:latin typeface="Arial"/>
               </a:rPr>
-              <a:t>Textbook  |  page 125</a:t>
+              <a:t>Textbook  |  page 193</a:t>
             </a:r>
           </a:p>
         </p:txBody>
@@ -42605,7 +42605,7 @@
                 </a:solidFill>
                 <a:latin typeface="Arial"/>
               </a:rPr>
-              <a:t>Textbook sections 8.1–8.2 pp.124–125; formula sheet p.219</a:t>
+              <a:t>Textbook sections 8.1–8.2 pp.192–194; formula sheet p.361</a:t>
             </a:r>
           </a:p>
         </p:txBody>
@@ -42677,7 +42677,7 @@
                 </a:solidFill>
                 <a:latin typeface="Arial"/>
               </a:rPr>
-              <a:t>Textbook p.125 • Example 8.1 — Brackets, calculator checks and units</a:t>
+              <a:t>Textbook p.193 • Example 8.1 — Brackets, calculator checks and units</a:t>
             </a:r>
           </a:p>
         </p:txBody>

--- a/carpentry/intake-142/PowerPoint/Day-15_2026-11-25_Week-5.pptx
+++ b/carpentry/intake-142/PowerPoint/Day-15_2026-11-25_Week-5.pptx
@@ -18597,6 +18597,104 @@
           </a:p>
         </p:txBody>
       </p:sp>
+      <p:sp>
+        <p:nvSpPr>
+          <p:cNvPr id="22" name="Play quiz W05-L03"/>
+          <p:cNvSpPr txBox="1"/>
+          <p:nvPr/>
+        </p:nvSpPr>
+        <p:spPr>
+          <a:xfrm>
+            <a:off x="6355080" y="6606540"/>
+            <a:ext cx="822960" cy="210312"/>
+          </a:xfrm>
+          <a:prstGeom prst="rect">
+            <a:avLst/>
+          </a:prstGeom>
+          <a:noFill/>
+        </p:spPr>
+        <p:txBody>
+          <a:bodyPr wrap="square" lIns="0" rIns="0" tIns="0" bIns="0" anchor="t">
+            <a:normAutofit fontScale="100000" lnSpcReduction="0"/>
+          </a:bodyPr>
+          <a:lstStyle/>
+          <a:p>
+            <a:pPr>
+              <a:spcBef>
+                <a:spcPts val="0"/>
+              </a:spcBef>
+              <a:spcAft>
+                <a:spcPts val="0"/>
+              </a:spcAft>
+              <a:defRPr sz="1000" b="0">
+                <a:solidFill>
+                  <a:srgbClr val="D0002B"/>
+                </a:solidFill>
+                <a:latin typeface="Arial"/>
+              </a:defRPr>
+            </a:pPr>
+            <a:r>
+              <a:rPr sz="1000">
+                <a:solidFill>
+                  <a:srgbClr val="F7F8FC"/>
+                </a:solidFill>
+                <a:latin typeface="Arial"/>
+                <a:hlinkClick r:id="rId8"/>
+              </a:rPr>
+              <a:t>Play quiz</a:t>
+            </a:r>
+          </a:p>
+        </p:txBody>
+      </p:sp>
+      <p:sp>
+        <p:nvSpPr>
+          <p:cNvPr id="23" name="Quiz PDF W05-L03"/>
+          <p:cNvSpPr txBox="1"/>
+          <p:nvPr/>
+        </p:nvSpPr>
+        <p:spPr>
+          <a:xfrm>
+            <a:off x="7296912" y="6606540"/>
+            <a:ext cx="1005840" cy="210312"/>
+          </a:xfrm>
+          <a:prstGeom prst="rect">
+            <a:avLst/>
+          </a:prstGeom>
+          <a:noFill/>
+        </p:spPr>
+        <p:txBody>
+          <a:bodyPr wrap="square" lIns="0" rIns="0" tIns="0" bIns="0" anchor="t">
+            <a:normAutofit fontScale="100000" lnSpcReduction="0"/>
+          </a:bodyPr>
+          <a:lstStyle/>
+          <a:p>
+            <a:pPr>
+              <a:spcBef>
+                <a:spcPts val="0"/>
+              </a:spcBef>
+              <a:spcAft>
+                <a:spcPts val="0"/>
+              </a:spcAft>
+              <a:defRPr sz="1000" b="0">
+                <a:solidFill>
+                  <a:srgbClr val="D0002B"/>
+                </a:solidFill>
+                <a:latin typeface="Arial"/>
+              </a:defRPr>
+            </a:pPr>
+            <a:r>
+              <a:rPr sz="1000">
+                <a:solidFill>
+                  <a:srgbClr val="F7F8FC"/>
+                </a:solidFill>
+                <a:latin typeface="Arial"/>
+                <a:hlinkClick r:id="rId9"/>
+              </a:rPr>
+              <a:t>Quiz PDF</a:t>
+            </a:r>
+          </a:p>
+        </p:txBody>
+      </p:sp>
     </p:spTree>
   </p:cSld>
   <p:clrMapOvr>
@@ -38169,6 +38267,104 @@
                 <a:latin typeface="Arial"/>
               </a:rPr>
               <a:t>Day 15  •  2026-11-25  •  44</a:t>
+            </a:r>
+          </a:p>
+        </p:txBody>
+      </p:sp>
+      <p:sp>
+        <p:nvSpPr>
+          <p:cNvPr id="22" name="Play quiz W05-L04"/>
+          <p:cNvSpPr txBox="1"/>
+          <p:nvPr/>
+        </p:nvSpPr>
+        <p:spPr>
+          <a:xfrm>
+            <a:off x="6355080" y="6606540"/>
+            <a:ext cx="822960" cy="210312"/>
+          </a:xfrm>
+          <a:prstGeom prst="rect">
+            <a:avLst/>
+          </a:prstGeom>
+          <a:noFill/>
+        </p:spPr>
+        <p:txBody>
+          <a:bodyPr wrap="square" lIns="0" rIns="0" tIns="0" bIns="0" anchor="t">
+            <a:normAutofit fontScale="100000" lnSpcReduction="0"/>
+          </a:bodyPr>
+          <a:lstStyle/>
+          <a:p>
+            <a:pPr>
+              <a:spcBef>
+                <a:spcPts val="0"/>
+              </a:spcBef>
+              <a:spcAft>
+                <a:spcPts val="0"/>
+              </a:spcAft>
+              <a:defRPr sz="1000" b="0">
+                <a:solidFill>
+                  <a:srgbClr val="D0002B"/>
+                </a:solidFill>
+                <a:latin typeface="Arial"/>
+              </a:defRPr>
+            </a:pPr>
+            <a:r>
+              <a:rPr sz="1000">
+                <a:solidFill>
+                  <a:srgbClr val="F7F8FC"/>
+                </a:solidFill>
+                <a:latin typeface="Arial"/>
+                <a:hlinkClick r:id="rId8"/>
+              </a:rPr>
+              <a:t>Play quiz</a:t>
+            </a:r>
+          </a:p>
+        </p:txBody>
+      </p:sp>
+      <p:sp>
+        <p:nvSpPr>
+          <p:cNvPr id="23" name="Quiz PDF W05-L04"/>
+          <p:cNvSpPr txBox="1"/>
+          <p:nvPr/>
+        </p:nvSpPr>
+        <p:spPr>
+          <a:xfrm>
+            <a:off x="7296912" y="6606540"/>
+            <a:ext cx="1005840" cy="210312"/>
+          </a:xfrm>
+          <a:prstGeom prst="rect">
+            <a:avLst/>
+          </a:prstGeom>
+          <a:noFill/>
+        </p:spPr>
+        <p:txBody>
+          <a:bodyPr wrap="square" lIns="0" rIns="0" tIns="0" bIns="0" anchor="t">
+            <a:normAutofit fontScale="100000" lnSpcReduction="0"/>
+          </a:bodyPr>
+          <a:lstStyle/>
+          <a:p>
+            <a:pPr>
+              <a:spcBef>
+                <a:spcPts val="0"/>
+              </a:spcBef>
+              <a:spcAft>
+                <a:spcPts val="0"/>
+              </a:spcAft>
+              <a:defRPr sz="1000" b="0">
+                <a:solidFill>
+                  <a:srgbClr val="D0002B"/>
+                </a:solidFill>
+                <a:latin typeface="Arial"/>
+              </a:defRPr>
+            </a:pPr>
+            <a:r>
+              <a:rPr sz="1000">
+                <a:solidFill>
+                  <a:srgbClr val="F7F8FC"/>
+                </a:solidFill>
+                <a:latin typeface="Arial"/>
+                <a:hlinkClick r:id="rId9"/>
+              </a:rPr>
+              <a:t>Quiz PDF</a:t>
             </a:r>
           </a:p>
         </p:txBody>
